--- a/template/movie_slide_template.pptx
+++ b/template/movie_slide_template.pptx
@@ -7,7 +7,7 @@
   <p:sldIdLst>
     <p:sldId id="257" r:id="rId4"/>
   </p:sldIdLst>
-  <p:sldSz cx="10080625" cy="6300788"/>
+  <p:sldSz cx="10080000" cy="6300000"/>
   <p:notesSz cx="7772400" cy="10058400"/>
 </p:presentation>
 </file>
